--- a/America The Beautiful-CH.pptx
+++ b/America The Beautiful-CH.pptx
@@ -267,7 +267,7 @@
           <a:p>
             <a:fld id="{E759A0DE-F190-5444-87AC-4719D5F20D15}" type="datetimeFigureOut">
               <a:rPr lang="en-US" smtClean="0"/>
-              <a:t>6/23/26</a:t>
+              <a:t>6/25/26</a:t>
             </a:fld>
             <a:endParaRPr lang="en-US"/>
           </a:p>
@@ -465,7 +465,7 @@
           <a:p>
             <a:fld id="{E759A0DE-F190-5444-87AC-4719D5F20D15}" type="datetimeFigureOut">
               <a:rPr lang="en-US" smtClean="0"/>
-              <a:t>6/23/26</a:t>
+              <a:t>6/25/26</a:t>
             </a:fld>
             <a:endParaRPr lang="en-US"/>
           </a:p>
@@ -673,7 +673,7 @@
           <a:p>
             <a:fld id="{E759A0DE-F190-5444-87AC-4719D5F20D15}" type="datetimeFigureOut">
               <a:rPr lang="en-US" smtClean="0"/>
-              <a:t>6/23/26</a:t>
+              <a:t>6/25/26</a:t>
             </a:fld>
             <a:endParaRPr lang="en-US"/>
           </a:p>
@@ -871,7 +871,7 @@
           <a:p>
             <a:fld id="{E759A0DE-F190-5444-87AC-4719D5F20D15}" type="datetimeFigureOut">
               <a:rPr lang="en-US" smtClean="0"/>
-              <a:t>6/23/26</a:t>
+              <a:t>6/25/26</a:t>
             </a:fld>
             <a:endParaRPr lang="en-US"/>
           </a:p>
@@ -1146,7 +1146,7 @@
           <a:p>
             <a:fld id="{E759A0DE-F190-5444-87AC-4719D5F20D15}" type="datetimeFigureOut">
               <a:rPr lang="en-US" smtClean="0"/>
-              <a:t>6/23/26</a:t>
+              <a:t>6/25/26</a:t>
             </a:fld>
             <a:endParaRPr lang="en-US"/>
           </a:p>
@@ -1411,7 +1411,7 @@
           <a:p>
             <a:fld id="{E759A0DE-F190-5444-87AC-4719D5F20D15}" type="datetimeFigureOut">
               <a:rPr lang="en-US" smtClean="0"/>
-              <a:t>6/23/26</a:t>
+              <a:t>6/25/26</a:t>
             </a:fld>
             <a:endParaRPr lang="en-US"/>
           </a:p>
@@ -1823,7 +1823,7 @@
           <a:p>
             <a:fld id="{E759A0DE-F190-5444-87AC-4719D5F20D15}" type="datetimeFigureOut">
               <a:rPr lang="en-US" smtClean="0"/>
-              <a:t>6/23/26</a:t>
+              <a:t>6/25/26</a:t>
             </a:fld>
             <a:endParaRPr lang="en-US"/>
           </a:p>
@@ -1964,7 +1964,7 @@
           <a:p>
             <a:fld id="{E759A0DE-F190-5444-87AC-4719D5F20D15}" type="datetimeFigureOut">
               <a:rPr lang="en-US" smtClean="0"/>
-              <a:t>6/23/26</a:t>
+              <a:t>6/25/26</a:t>
             </a:fld>
             <a:endParaRPr lang="en-US"/>
           </a:p>
@@ -2077,7 +2077,7 @@
           <a:p>
             <a:fld id="{E759A0DE-F190-5444-87AC-4719D5F20D15}" type="datetimeFigureOut">
               <a:rPr lang="en-US" smtClean="0"/>
-              <a:t>6/23/26</a:t>
+              <a:t>6/25/26</a:t>
             </a:fld>
             <a:endParaRPr lang="en-US"/>
           </a:p>
@@ -2388,7 +2388,7 @@
           <a:p>
             <a:fld id="{E759A0DE-F190-5444-87AC-4719D5F20D15}" type="datetimeFigureOut">
               <a:rPr lang="en-US" smtClean="0"/>
-              <a:t>6/23/26</a:t>
+              <a:t>6/25/26</a:t>
             </a:fld>
             <a:endParaRPr lang="en-US"/>
           </a:p>
@@ -2676,7 +2676,7 @@
           <a:p>
             <a:fld id="{E759A0DE-F190-5444-87AC-4719D5F20D15}" type="datetimeFigureOut">
               <a:rPr lang="en-US" smtClean="0"/>
-              <a:t>6/23/26</a:t>
+              <a:t>6/25/26</a:t>
             </a:fld>
             <a:endParaRPr lang="en-US"/>
           </a:p>
@@ -2917,7 +2917,7 @@
           <a:p>
             <a:fld id="{E759A0DE-F190-5444-87AC-4719D5F20D15}" type="datetimeFigureOut">
               <a:rPr lang="en-US" smtClean="0"/>
-              <a:t>6/23/26</a:t>
+              <a:t>6/25/26</a:t>
             </a:fld>
             <a:endParaRPr lang="en-US"/>
           </a:p>

--- a/America The Beautiful-CH.pptx
+++ b/America The Beautiful-CH.pptx
@@ -12,8 +12,6 @@
     <p:sldId id="287" r:id="rId6"/>
     <p:sldId id="288" r:id="rId7"/>
     <p:sldId id="289" r:id="rId8"/>
-    <p:sldId id="290" r:id="rId9"/>
-    <p:sldId id="291" r:id="rId10"/>
   </p:sldIdLst>
   <p:sldSz cx="12192000" cy="6858000"/>
   <p:notesSz cx="6858000" cy="9144000"/>
@@ -267,7 +265,7 @@
           <a:p>
             <a:fld id="{E759A0DE-F190-5444-87AC-4719D5F20D15}" type="datetimeFigureOut">
               <a:rPr lang="en-US" smtClean="0"/>
-              <a:t>6/25/26</a:t>
+              <a:t>6/27/26</a:t>
             </a:fld>
             <a:endParaRPr lang="en-US"/>
           </a:p>
@@ -465,7 +463,7 @@
           <a:p>
             <a:fld id="{E759A0DE-F190-5444-87AC-4719D5F20D15}" type="datetimeFigureOut">
               <a:rPr lang="en-US" smtClean="0"/>
-              <a:t>6/25/26</a:t>
+              <a:t>6/27/26</a:t>
             </a:fld>
             <a:endParaRPr lang="en-US"/>
           </a:p>
@@ -673,7 +671,7 @@
           <a:p>
             <a:fld id="{E759A0DE-F190-5444-87AC-4719D5F20D15}" type="datetimeFigureOut">
               <a:rPr lang="en-US" smtClean="0"/>
-              <a:t>6/25/26</a:t>
+              <a:t>6/27/26</a:t>
             </a:fld>
             <a:endParaRPr lang="en-US"/>
           </a:p>
@@ -871,7 +869,7 @@
           <a:p>
             <a:fld id="{E759A0DE-F190-5444-87AC-4719D5F20D15}" type="datetimeFigureOut">
               <a:rPr lang="en-US" smtClean="0"/>
-              <a:t>6/25/26</a:t>
+              <a:t>6/27/26</a:t>
             </a:fld>
             <a:endParaRPr lang="en-US"/>
           </a:p>
@@ -1146,7 +1144,7 @@
           <a:p>
             <a:fld id="{E759A0DE-F190-5444-87AC-4719D5F20D15}" type="datetimeFigureOut">
               <a:rPr lang="en-US" smtClean="0"/>
-              <a:t>6/25/26</a:t>
+              <a:t>6/27/26</a:t>
             </a:fld>
             <a:endParaRPr lang="en-US"/>
           </a:p>
@@ -1411,7 +1409,7 @@
           <a:p>
             <a:fld id="{E759A0DE-F190-5444-87AC-4719D5F20D15}" type="datetimeFigureOut">
               <a:rPr lang="en-US" smtClean="0"/>
-              <a:t>6/25/26</a:t>
+              <a:t>6/27/26</a:t>
             </a:fld>
             <a:endParaRPr lang="en-US"/>
           </a:p>
@@ -1823,7 +1821,7 @@
           <a:p>
             <a:fld id="{E759A0DE-F190-5444-87AC-4719D5F20D15}" type="datetimeFigureOut">
               <a:rPr lang="en-US" smtClean="0"/>
-              <a:t>6/25/26</a:t>
+              <a:t>6/27/26</a:t>
             </a:fld>
             <a:endParaRPr lang="en-US"/>
           </a:p>
@@ -1964,7 +1962,7 @@
           <a:p>
             <a:fld id="{E759A0DE-F190-5444-87AC-4719D5F20D15}" type="datetimeFigureOut">
               <a:rPr lang="en-US" smtClean="0"/>
-              <a:t>6/25/26</a:t>
+              <a:t>6/27/26</a:t>
             </a:fld>
             <a:endParaRPr lang="en-US"/>
           </a:p>
@@ -2077,7 +2075,7 @@
           <a:p>
             <a:fld id="{E759A0DE-F190-5444-87AC-4719D5F20D15}" type="datetimeFigureOut">
               <a:rPr lang="en-US" smtClean="0"/>
-              <a:t>6/25/26</a:t>
+              <a:t>6/27/26</a:t>
             </a:fld>
             <a:endParaRPr lang="en-US"/>
           </a:p>
@@ -2388,7 +2386,7 @@
           <a:p>
             <a:fld id="{E759A0DE-F190-5444-87AC-4719D5F20D15}" type="datetimeFigureOut">
               <a:rPr lang="en-US" smtClean="0"/>
-              <a:t>6/25/26</a:t>
+              <a:t>6/27/26</a:t>
             </a:fld>
             <a:endParaRPr lang="en-US"/>
           </a:p>
@@ -2676,7 +2674,7 @@
           <a:p>
             <a:fld id="{E759A0DE-F190-5444-87AC-4719D5F20D15}" type="datetimeFigureOut">
               <a:rPr lang="en-US" smtClean="0"/>
-              <a:t>6/25/26</a:t>
+              <a:t>6/27/26</a:t>
             </a:fld>
             <a:endParaRPr lang="en-US"/>
           </a:p>
@@ -2917,7 +2915,7 @@
           <a:p>
             <a:fld id="{E759A0DE-F190-5444-87AC-4719D5F20D15}" type="datetimeFigureOut">
               <a:rPr lang="en-US" smtClean="0"/>
-              <a:t>6/25/26</a:t>
+              <a:t>6/27/26</a:t>
             </a:fld>
             <a:endParaRPr lang="en-US"/>
           </a:p>
@@ -4032,7 +4030,7 @@
     <p:bg>
       <p:bgPr>
         <a:solidFill>
-          <a:schemeClr val="accent1"/>
+          <a:schemeClr val="tx1"/>
         </a:solidFill>
         <a:effectLst/>
       </p:bgPr>
@@ -4075,8 +4073,8 @@
         </p:nvSpPr>
         <p:spPr>
           <a:xfrm>
-            <a:off x="175846" y="152399"/>
-            <a:ext cx="11828585" cy="6541477"/>
+            <a:off x="175847" y="152399"/>
+            <a:ext cx="10614074" cy="6541477"/>
           </a:xfrm>
         </p:spPr>
         <p:txBody>
@@ -4409,7 +4407,7 @@
     <p:bg>
       <p:bgPr>
         <a:solidFill>
-          <a:schemeClr val="accent1"/>
+          <a:schemeClr val="tx1"/>
         </a:solidFill>
         <a:effectLst/>
       </p:bgPr>
@@ -4783,7 +4781,7 @@
     <p:bg>
       <p:bgPr>
         <a:solidFill>
-          <a:schemeClr val="accent1"/>
+          <a:schemeClr val="tx1"/>
         </a:solidFill>
         <a:effectLst/>
       </p:bgPr>
@@ -4954,384 +4952,49 @@
           </a:p>
         </p:txBody>
       </p:sp>
+      <p:sp>
+        <p:nvSpPr>
+          <p:cNvPr id="2" name="TextBox 1">
+            <a:extLst>
+              <a:ext uri="{FF2B5EF4-FFF2-40B4-BE49-F238E27FC236}">
+                <a16:creationId xmlns:a16="http://schemas.microsoft.com/office/drawing/2014/main" id="{2BF68571-49F4-206E-48AA-92A353B239A8}"/>
+              </a:ext>
+            </a:extLst>
+          </p:cNvPr>
+          <p:cNvSpPr txBox="1"/>
+          <p:nvPr/>
+        </p:nvSpPr>
+        <p:spPr>
+          <a:xfrm>
+            <a:off x="10257692" y="6273225"/>
+            <a:ext cx="1500554" cy="584775"/>
+          </a:xfrm>
+          <a:prstGeom prst="rect">
+            <a:avLst/>
+          </a:prstGeom>
+          <a:noFill/>
+        </p:spPr>
+        <p:txBody>
+          <a:bodyPr wrap="square" rtlCol="0">
+            <a:spAutoFit/>
+          </a:bodyPr>
+          <a:lstStyle/>
+          <a:p>
+            <a:r>
+              <a:rPr lang="en-US" sz="3200" b="1" dirty="0">
+                <a:solidFill>
+                  <a:srgbClr val="FFFF00"/>
+                </a:solidFill>
+              </a:rPr>
+              <a:t>END</a:t>
+            </a:r>
+          </a:p>
+        </p:txBody>
+      </p:sp>
     </p:spTree>
     <p:extLst>
       <p:ext uri="{BB962C8B-B14F-4D97-AF65-F5344CB8AC3E}">
         <p14:creationId xmlns:p14="http://schemas.microsoft.com/office/powerpoint/2010/main" val="2979982301"/>
-      </p:ext>
-    </p:extLst>
-  </p:cSld>
-  <p:clrMapOvr>
-    <a:masterClrMapping/>
-  </p:clrMapOvr>
-</p:sld>
-</file>
-
-<file path=ppt/slides/slide8.xml><?xml version="1.0" encoding="utf-8"?>
-<p:sld xmlns:a="http://schemas.openxmlformats.org/drawingml/2006/main" xmlns:r="http://schemas.openxmlformats.org/officeDocument/2006/relationships" xmlns:p="http://schemas.openxmlformats.org/presentationml/2006/main">
-  <p:cSld>
-    <p:bg>
-      <p:bgPr>
-        <a:solidFill>
-          <a:schemeClr val="accent1"/>
-        </a:solidFill>
-        <a:effectLst/>
-      </p:bgPr>
-    </p:bg>
-    <p:spTree>
-      <p:nvGrpSpPr>
-        <p:cNvPr id="1" name="">
-          <a:extLst>
-            <a:ext uri="{FF2B5EF4-FFF2-40B4-BE49-F238E27FC236}">
-              <a16:creationId xmlns:a16="http://schemas.microsoft.com/office/drawing/2014/main" id="{8B61CAA4-0173-1D1F-7906-D9D5FE557937}"/>
-            </a:ext>
-          </a:extLst>
-        </p:cNvPr>
-        <p:cNvGrpSpPr/>
-        <p:nvPr/>
-      </p:nvGrpSpPr>
-      <p:grpSpPr>
-        <a:xfrm>
-          <a:off x="0" y="0"/>
-          <a:ext cx="0" cy="0"/>
-          <a:chOff x="0" y="0"/>
-          <a:chExt cx="0" cy="0"/>
-        </a:xfrm>
-      </p:grpSpPr>
-      <p:sp>
-        <p:nvSpPr>
-          <p:cNvPr id="3" name="Subtitle 2">
-            <a:extLst>
-              <a:ext uri="{FF2B5EF4-FFF2-40B4-BE49-F238E27FC236}">
-                <a16:creationId xmlns:a16="http://schemas.microsoft.com/office/drawing/2014/main" id="{87BA5DF3-071A-E814-6CCE-56BDBF8A99E5}"/>
-              </a:ext>
-            </a:extLst>
-          </p:cNvPr>
-          <p:cNvSpPr>
-            <a:spLocks noGrp="1"/>
-          </p:cNvSpPr>
-          <p:nvPr>
-            <p:ph type="subTitle" idx="1"/>
-          </p:nvPr>
-        </p:nvSpPr>
-        <p:spPr>
-          <a:xfrm>
-            <a:off x="175846" y="152399"/>
-            <a:ext cx="11828585" cy="6541477"/>
-          </a:xfrm>
-        </p:spPr>
-        <p:txBody>
-          <a:bodyPr>
-            <a:noAutofit/>
-          </a:bodyPr>
-          <a:lstStyle/>
-          <a:p>
-            <a:pPr algn="l"/>
-            <a:endParaRPr lang="en-US" sz="3600" dirty="0">
-              <a:solidFill>
-                <a:schemeClr val="bg1"/>
-              </a:solidFill>
-              <a:latin typeface="Avenir Medium" panose="02000503020000020003" pitchFamily="2" charset="0"/>
-              <a:ea typeface="Bodoni Ornaments" pitchFamily="2" charset="0"/>
-            </a:endParaRPr>
-          </a:p>
-          <a:p>
-            <a:pPr algn="l"/>
-            <a:r>
-              <a:rPr lang="en-US" sz="3600" dirty="0">
-                <a:solidFill>
-                  <a:srgbClr val="FFFF00"/>
-                </a:solidFill>
-                <a:latin typeface="Avenir Medium" panose="02000503020000020003" pitchFamily="2" charset="0"/>
-                <a:ea typeface="Bodoni Ornaments" pitchFamily="2" charset="0"/>
-              </a:rPr>
-              <a:t>    G                  D</a:t>
-            </a:r>
-          </a:p>
-          <a:p>
-            <a:pPr algn="l"/>
-            <a:r>
-              <a:rPr lang="en-US" sz="3600" dirty="0">
-                <a:solidFill>
-                  <a:schemeClr val="bg1"/>
-                </a:solidFill>
-                <a:latin typeface="Avenir Medium" panose="02000503020000020003" pitchFamily="2" charset="0"/>
-                <a:ea typeface="Bodoni Ornaments" pitchFamily="2" charset="0"/>
-              </a:rPr>
-              <a:t>O beautiful for pilgrims feet,</a:t>
-            </a:r>
-          </a:p>
-          <a:p>
-            <a:pPr algn="l"/>
-            <a:r>
-              <a:rPr lang="en-US" sz="3600" dirty="0">
-                <a:solidFill>
-                  <a:srgbClr val="FFFF00"/>
-                </a:solidFill>
-                <a:latin typeface="Avenir Medium" panose="02000503020000020003" pitchFamily="2" charset="0"/>
-                <a:ea typeface="Bodoni Ornaments" pitchFamily="2" charset="0"/>
-              </a:rPr>
-              <a:t>            D7                          G</a:t>
-            </a:r>
-          </a:p>
-          <a:p>
-            <a:pPr algn="l"/>
-            <a:r>
-              <a:rPr lang="en-US" sz="3600" dirty="0">
-                <a:solidFill>
-                  <a:schemeClr val="bg1"/>
-                </a:solidFill>
-                <a:latin typeface="Avenir Medium" panose="02000503020000020003" pitchFamily="2" charset="0"/>
-                <a:ea typeface="Bodoni Ornaments" pitchFamily="2" charset="0"/>
-              </a:rPr>
-              <a:t>Whose stem impassioned stress</a:t>
-            </a:r>
-          </a:p>
-          <a:p>
-            <a:pPr algn="l"/>
-            <a:r>
-              <a:rPr lang="en-US" sz="3600" dirty="0">
-                <a:solidFill>
-                  <a:srgbClr val="FFFF00"/>
-                </a:solidFill>
-                <a:latin typeface="Avenir Medium" panose="02000503020000020003" pitchFamily="2" charset="0"/>
-                <a:ea typeface="Bodoni Ornaments" pitchFamily="2" charset="0"/>
-              </a:rPr>
-              <a:t>                                D</a:t>
-            </a:r>
-          </a:p>
-          <a:p>
-            <a:pPr algn="l"/>
-            <a:r>
-              <a:rPr lang="en-US" sz="3600" dirty="0">
-                <a:solidFill>
-                  <a:schemeClr val="bg1"/>
-                </a:solidFill>
-                <a:latin typeface="Avenir Medium" panose="02000503020000020003" pitchFamily="2" charset="0"/>
-                <a:ea typeface="Bodoni Ornaments" pitchFamily="2" charset="0"/>
-              </a:rPr>
-              <a:t>A thoroughfare for freedom beat</a:t>
-            </a:r>
-          </a:p>
-          <a:p>
-            <a:pPr algn="l"/>
-            <a:r>
-              <a:rPr lang="en-US" sz="3600" dirty="0">
-                <a:solidFill>
-                  <a:srgbClr val="FFFF00"/>
-                </a:solidFill>
-                <a:latin typeface="Avenir Medium" panose="02000503020000020003" pitchFamily="2" charset="0"/>
-                <a:ea typeface="Bodoni Ornaments" pitchFamily="2" charset="0"/>
-              </a:rPr>
-              <a:t>A          A7 D            D7 </a:t>
-            </a:r>
-          </a:p>
-          <a:p>
-            <a:pPr algn="l"/>
-            <a:r>
-              <a:rPr lang="en-US" sz="3600" dirty="0">
-                <a:solidFill>
-                  <a:schemeClr val="bg1"/>
-                </a:solidFill>
-                <a:latin typeface="Avenir Medium" panose="02000503020000020003" pitchFamily="2" charset="0"/>
-                <a:ea typeface="Bodoni Ornaments" pitchFamily="2" charset="0"/>
-              </a:rPr>
-              <a:t>Across the wilderness!</a:t>
-            </a:r>
-          </a:p>
-        </p:txBody>
-      </p:sp>
-    </p:spTree>
-    <p:extLst>
-      <p:ext uri="{BB962C8B-B14F-4D97-AF65-F5344CB8AC3E}">
-        <p14:creationId xmlns:p14="http://schemas.microsoft.com/office/powerpoint/2010/main" val="3132662528"/>
-      </p:ext>
-    </p:extLst>
-  </p:cSld>
-  <p:clrMapOvr>
-    <a:masterClrMapping/>
-  </p:clrMapOvr>
-</p:sld>
-</file>
-
-<file path=ppt/slides/slide9.xml><?xml version="1.0" encoding="utf-8"?>
-<p:sld xmlns:a="http://schemas.openxmlformats.org/drawingml/2006/main" xmlns:r="http://schemas.openxmlformats.org/officeDocument/2006/relationships" xmlns:p="http://schemas.openxmlformats.org/presentationml/2006/main">
-  <p:cSld>
-    <p:bg>
-      <p:bgPr>
-        <a:solidFill>
-          <a:schemeClr val="accent1"/>
-        </a:solidFill>
-        <a:effectLst/>
-      </p:bgPr>
-    </p:bg>
-    <p:spTree>
-      <p:nvGrpSpPr>
-        <p:cNvPr id="1" name="">
-          <a:extLst>
-            <a:ext uri="{FF2B5EF4-FFF2-40B4-BE49-F238E27FC236}">
-              <a16:creationId xmlns:a16="http://schemas.microsoft.com/office/drawing/2014/main" id="{FE52B345-8380-D2BA-B6CC-4EDE1CD838FD}"/>
-            </a:ext>
-          </a:extLst>
-        </p:cNvPr>
-        <p:cNvGrpSpPr/>
-        <p:nvPr/>
-      </p:nvGrpSpPr>
-      <p:grpSpPr>
-        <a:xfrm>
-          <a:off x="0" y="0"/>
-          <a:ext cx="0" cy="0"/>
-          <a:chOff x="0" y="0"/>
-          <a:chExt cx="0" cy="0"/>
-        </a:xfrm>
-      </p:grpSpPr>
-      <p:sp>
-        <p:nvSpPr>
-          <p:cNvPr id="3" name="Subtitle 2">
-            <a:extLst>
-              <a:ext uri="{FF2B5EF4-FFF2-40B4-BE49-F238E27FC236}">
-                <a16:creationId xmlns:a16="http://schemas.microsoft.com/office/drawing/2014/main" id="{0736364E-6537-C68D-F1DA-A5F444E0BFD3}"/>
-              </a:ext>
-            </a:extLst>
-          </p:cNvPr>
-          <p:cNvSpPr>
-            <a:spLocks noGrp="1"/>
-          </p:cNvSpPr>
-          <p:nvPr>
-            <p:ph type="subTitle" idx="1"/>
-          </p:nvPr>
-        </p:nvSpPr>
-        <p:spPr>
-          <a:xfrm>
-            <a:off x="175846" y="152399"/>
-            <a:ext cx="11828585" cy="6541477"/>
-          </a:xfrm>
-        </p:spPr>
-        <p:txBody>
-          <a:bodyPr>
-            <a:noAutofit/>
-          </a:bodyPr>
-          <a:lstStyle/>
-          <a:p>
-            <a:pPr algn="l"/>
-            <a:endParaRPr lang="en-US" sz="3600" dirty="0">
-              <a:solidFill>
-                <a:schemeClr val="bg1"/>
-              </a:solidFill>
-              <a:latin typeface="Avenir Medium" panose="02000503020000020003" pitchFamily="2" charset="0"/>
-              <a:ea typeface="Bodoni Ornaments" pitchFamily="2" charset="0"/>
-            </a:endParaRPr>
-          </a:p>
-          <a:p>
-            <a:pPr algn="l"/>
-            <a:r>
-              <a:rPr lang="en-US" sz="3600" dirty="0">
-                <a:solidFill>
-                  <a:srgbClr val="FFFF00"/>
-                </a:solidFill>
-                <a:latin typeface="Avenir Medium" panose="02000503020000020003" pitchFamily="2" charset="0"/>
-                <a:ea typeface="Bodoni Ornaments" pitchFamily="2" charset="0"/>
-              </a:rPr>
-              <a:t>G             D</a:t>
-            </a:r>
-          </a:p>
-          <a:p>
-            <a:pPr algn="l"/>
-            <a:r>
-              <a:rPr lang="en-US" sz="3600" dirty="0">
-                <a:solidFill>
-                  <a:schemeClr val="bg1"/>
-                </a:solidFill>
-                <a:latin typeface="Avenir Medium" panose="02000503020000020003" pitchFamily="2" charset="0"/>
-                <a:ea typeface="Bodoni Ornaments" pitchFamily="2" charset="0"/>
-              </a:rPr>
-              <a:t>America! America!</a:t>
-            </a:r>
-          </a:p>
-          <a:p>
-            <a:pPr algn="l"/>
-            <a:r>
-              <a:rPr lang="en-US" sz="3600" dirty="0">
-                <a:solidFill>
-                  <a:srgbClr val="FFFF00"/>
-                </a:solidFill>
-                <a:latin typeface="Avenir Medium" panose="02000503020000020003" pitchFamily="2" charset="0"/>
-                <a:ea typeface="Bodoni Ornaments" pitchFamily="2" charset="0"/>
-              </a:rPr>
-              <a:t>        D7                         G</a:t>
-            </a:r>
-          </a:p>
-          <a:p>
-            <a:pPr algn="l"/>
-            <a:r>
-              <a:rPr lang="en-US" sz="3600" dirty="0">
-                <a:solidFill>
-                  <a:schemeClr val="bg1"/>
-                </a:solidFill>
-                <a:latin typeface="Avenir Medium" panose="02000503020000020003" pitchFamily="2" charset="0"/>
-                <a:ea typeface="Bodoni Ornaments" pitchFamily="2" charset="0"/>
-              </a:rPr>
-              <a:t>God shed his grace on thee</a:t>
-            </a:r>
-          </a:p>
-          <a:p>
-            <a:pPr algn="l"/>
-            <a:r>
-              <a:rPr lang="en-US" sz="3600" dirty="0">
-                <a:solidFill>
-                  <a:srgbClr val="FFFF00"/>
-                </a:solidFill>
-                <a:latin typeface="Avenir Medium" panose="02000503020000020003" pitchFamily="2" charset="0"/>
-                <a:ea typeface="Bodoni Ornaments" pitchFamily="2" charset="0"/>
-              </a:rPr>
-              <a:t>      C                                                      G                         </a:t>
-            </a:r>
-          </a:p>
-          <a:p>
-            <a:pPr algn="l"/>
-            <a:r>
-              <a:rPr lang="en-US" sz="3600" dirty="0">
-                <a:solidFill>
-                  <a:schemeClr val="bg1"/>
-                </a:solidFill>
-                <a:latin typeface="Avenir Medium" panose="02000503020000020003" pitchFamily="2" charset="0"/>
-                <a:ea typeface="Bodoni Ornaments" pitchFamily="2" charset="0"/>
-              </a:rPr>
-              <a:t>Till paths be wrought through wilds of thought</a:t>
-            </a:r>
-          </a:p>
-          <a:p>
-            <a:pPr algn="l"/>
-            <a:r>
-              <a:rPr lang="en-US" sz="3600" dirty="0">
-                <a:solidFill>
-                  <a:srgbClr val="FFFF00"/>
-                </a:solidFill>
-                <a:latin typeface="Avenir Medium" panose="02000503020000020003" pitchFamily="2" charset="0"/>
-                <a:ea typeface="Bodoni Ornaments" pitchFamily="2" charset="0"/>
-              </a:rPr>
-              <a:t>     C         D7          G</a:t>
-            </a:r>
-          </a:p>
-          <a:p>
-            <a:pPr algn="l"/>
-            <a:r>
-              <a:rPr lang="en-US" sz="3600" dirty="0">
-                <a:solidFill>
-                  <a:schemeClr val="bg1"/>
-                </a:solidFill>
-                <a:latin typeface="Avenir Medium" panose="02000503020000020003" pitchFamily="2" charset="0"/>
-                <a:ea typeface="Bodoni Ornaments" pitchFamily="2" charset="0"/>
-              </a:rPr>
-              <a:t>By pilgrim foot and knee!</a:t>
-            </a:r>
-          </a:p>
-        </p:txBody>
-      </p:sp>
-    </p:spTree>
-    <p:extLst>
-      <p:ext uri="{BB962C8B-B14F-4D97-AF65-F5344CB8AC3E}">
-        <p14:creationId xmlns:p14="http://schemas.microsoft.com/office/powerpoint/2010/main" val="1440470976"/>
       </p:ext>
     </p:extLst>
   </p:cSld>
